--- a/dist/초1/수학/몇째와짝수홀수/초1_수학_몇째와짝수홀수_02_짝수와홀수.pptx
+++ b/dist/초1/수학/몇째와짝수홀수/초1_수학_몇째와짝수홀수_02_짝수와홀수.pptx
@@ -121,13 +121,13 @@
   <p:extLst>
     <p:ext uri="{521415D9-36F7-43E2-AB2F-B90AF26B5E84}">
       <p14:sectionLst xmlns:p14="http://schemas.microsoft.com/office/powerpoint/2010/main">
-        <p14:section name="도입" id="{aac84cf7-a812-b360-04d9-476552513520}">
+        <p14:section name="도입" id="{fb6ab6ff-592d-db7a-463d-08cee1398589}">
           <p14:sldIdLst>
             <p14:sldId id="256"/>
             <p14:sldId id="257"/>
           </p14:sldIdLst>
         </p14:section>
-        <p14:section name="개념" id="{8fb2c4bc-2a9d-f480-05a8-a5cfee3bafe2}">
+        <p14:section name="개념" id="{91f47c9a-9b1e-79f9-9965-01c7dad16def}">
           <p14:sldIdLst>
             <p14:sldId id="258"/>
             <p14:sldId id="259"/>
@@ -136,32 +136,32 @@
             <p14:sldId id="263"/>
           </p14:sldIdLst>
         </p14:section>
-        <p14:section name="연습" id="{3766bcf9-c07a-89db-20e3-e50b291e4eb8}">
+        <p14:section name="연습" id="{05941e14-e5c0-28f9-3ab8-abc354e6dcb5}">
           <p14:sldIdLst>
             <p14:sldId id="261"/>
             <p14:sldId id="264"/>
             <p14:sldId id="265"/>
           </p14:sldIdLst>
         </p14:section>
-        <p14:section name="개념" id="{88d7fe83-d4ad-3b55-0d5d-cf7aa156b663}">
+        <p14:section name="개념" id="{9c6b43f5-7ae2-dfb2-778a-3421af981fc5}">
           <p14:sldIdLst/>
         </p14:section>
-        <p14:section name="연습" id="{e777ad2e-3e9c-37bf-22e2-6e5ceabcc4cb}">
+        <p14:section name="연습" id="{576554f2-c749-84d0-cebf-583f09c605ed}">
           <p14:sldIdLst/>
         </p14:section>
-        <p14:section name="확인" id="{1aea1ea7-9637-ca29-137c-972a09f4d8dc}">
+        <p14:section name="확인" id="{99de6ea2-4c53-5dee-da1a-da609a9e40c4}">
           <p14:sldIdLst>
             <p14:sldId id="266"/>
             <p14:sldId id="267"/>
             <p14:sldId id="268"/>
           </p14:sldIdLst>
         </p14:section>
-        <p14:section name="정리" id="{f5317bb6-bb2a-385f-c596-e1444a9385ec}">
+        <p14:section name="정리" id="{ba4fcb5c-7d83-24bc-3184-2d8556127be4}">
           <p14:sldIdLst>
             <p14:sldId id="269"/>
           </p14:sldIdLst>
         </p14:section>
-        <p14:section name="보충" id="{b92ce568-4aa3-d78a-e040-1c6fde6d4464}">
+        <p14:section name="보충" id="{47bd383e-a5c2-bef8-2269-adec009a0670}">
           <p14:sldIdLst>
             <p14:sldId id="270"/>
           </p14:sldIdLst>

--- a/dist/초1/수학/몇째와짝수홀수/초1_수학_몇째와짝수홀수_02_짝수와홀수.pptx
+++ b/dist/초1/수학/몇째와짝수홀수/초1_수학_몇째와짝수홀수_02_짝수와홀수.pptx
@@ -121,13 +121,13 @@
   <p:extLst>
     <p:ext uri="{521415D9-36F7-43E2-AB2F-B90AF26B5E84}">
       <p14:sectionLst xmlns:p14="http://schemas.microsoft.com/office/powerpoint/2010/main">
-        <p14:section name="도입" id="{fb6ab6ff-592d-db7a-463d-08cee1398589}">
+        <p14:section name="도입" id="{d3bebc85-69da-e866-609a-095048c223cf}">
           <p14:sldIdLst>
             <p14:sldId id="256"/>
             <p14:sldId id="257"/>
           </p14:sldIdLst>
         </p14:section>
-        <p14:section name="개념" id="{91f47c9a-9b1e-79f9-9965-01c7dad16def}">
+        <p14:section name="개념" id="{a72298d8-d879-95e2-9ad1-21478cf08dda}">
           <p14:sldIdLst>
             <p14:sldId id="258"/>
             <p14:sldId id="259"/>
@@ -136,32 +136,32 @@
             <p14:sldId id="263"/>
           </p14:sldIdLst>
         </p14:section>
-        <p14:section name="연습" id="{05941e14-e5c0-28f9-3ab8-abc354e6dcb5}">
+        <p14:section name="연습" id="{d7690fa4-1931-0de4-f125-f4e7bb90c49f}">
           <p14:sldIdLst>
             <p14:sldId id="261"/>
             <p14:sldId id="264"/>
             <p14:sldId id="265"/>
           </p14:sldIdLst>
         </p14:section>
-        <p14:section name="개념" id="{9c6b43f5-7ae2-dfb2-778a-3421af981fc5}">
+        <p14:section name="개념" id="{375d65ae-c874-f1b5-d9c9-537ba84f092b}">
           <p14:sldIdLst/>
         </p14:section>
-        <p14:section name="연습" id="{576554f2-c749-84d0-cebf-583f09c605ed}">
+        <p14:section name="연습" id="{65594fb6-223a-1524-180e-17af85675a21}">
           <p14:sldIdLst/>
         </p14:section>
-        <p14:section name="확인" id="{99de6ea2-4c53-5dee-da1a-da609a9e40c4}">
+        <p14:section name="확인" id="{21091f42-2e4f-49c3-4bc1-6bf07f74e8ed}">
           <p14:sldIdLst>
             <p14:sldId id="266"/>
             <p14:sldId id="267"/>
             <p14:sldId id="268"/>
           </p14:sldIdLst>
         </p14:section>
-        <p14:section name="정리" id="{ba4fcb5c-7d83-24bc-3184-2d8556127be4}">
+        <p14:section name="정리" id="{44209ae3-30b6-8980-5a61-60b0a6f3620c}">
           <p14:sldIdLst>
             <p14:sldId id="269"/>
           </p14:sldIdLst>
         </p14:section>
-        <p14:section name="보충" id="{47bd383e-a5c2-bef8-2269-adec009a0670}">
+        <p14:section name="보충" id="{72813450-69e2-bc24-ac52-af95a0b4688d}">
           <p14:sldIdLst>
             <p14:sldId id="270"/>
           </p14:sldIdLst>
@@ -4124,7 +4124,7 @@
         </p:nvSpPr>
         <p:spPr>
           <a:xfrm>
-            <a:off x="548640" y="2459736"/>
+            <a:off x="548640" y="2734056"/>
             <a:ext cx="566928" cy="566928"/>
           </a:xfrm>
           <a:prstGeom prst="roundRect">
@@ -4171,8 +4171,8 @@
         </p:nvSpPr>
         <p:spPr>
           <a:xfrm>
-            <a:off x="1432966" y="2598318"/>
-            <a:ext cx="289763" cy="289763"/>
+            <a:off x="1440591" y="2860197"/>
+            <a:ext cx="314645" cy="314645"/>
           </a:xfrm>
           <a:prstGeom prst="ellipse">
             <a:avLst/>
@@ -4196,8 +4196,8 @@
         </p:nvSpPr>
         <p:spPr>
           <a:xfrm>
-            <a:off x="1900326" y="2598318"/>
-            <a:ext cx="289763" cy="289763"/>
+            <a:off x="1948083" y="2860197"/>
+            <a:ext cx="314645" cy="314645"/>
           </a:xfrm>
           <a:prstGeom prst="ellipse">
             <a:avLst/>
@@ -4221,8 +4221,8 @@
         </p:nvSpPr>
         <p:spPr>
           <a:xfrm>
-            <a:off x="2367686" y="2598318"/>
-            <a:ext cx="289763" cy="289763"/>
+            <a:off x="2455575" y="2860197"/>
+            <a:ext cx="314645" cy="314645"/>
           </a:xfrm>
           <a:prstGeom prst="ellipse">
             <a:avLst/>
@@ -4246,8 +4246,8 @@
         </p:nvSpPr>
         <p:spPr>
           <a:xfrm>
-            <a:off x="2835046" y="2598318"/>
-            <a:ext cx="289763" cy="289763"/>
+            <a:off x="2963067" y="2860197"/>
+            <a:ext cx="314645" cy="314645"/>
           </a:xfrm>
           <a:prstGeom prst="ellipse">
             <a:avLst/>
@@ -4271,8 +4271,8 @@
         </p:nvSpPr>
         <p:spPr>
           <a:xfrm>
-            <a:off x="3302406" y="2598318"/>
-            <a:ext cx="289763" cy="289763"/>
+            <a:off x="3470559" y="2860197"/>
+            <a:ext cx="314645" cy="314645"/>
           </a:xfrm>
           <a:prstGeom prst="ellipse">
             <a:avLst/>
@@ -4296,8 +4296,8 @@
         </p:nvSpPr>
         <p:spPr>
           <a:xfrm>
-            <a:off x="3769766" y="2598318"/>
-            <a:ext cx="289763" cy="289763"/>
+            <a:off x="3978051" y="2860197"/>
+            <a:ext cx="314645" cy="314645"/>
           </a:xfrm>
           <a:prstGeom prst="ellipse">
             <a:avLst/>
@@ -4321,8 +4321,8 @@
         </p:nvSpPr>
         <p:spPr>
           <a:xfrm>
-            <a:off x="4237126" y="2598318"/>
-            <a:ext cx="289763" cy="289763"/>
+            <a:off x="4485543" y="2860197"/>
+            <a:ext cx="314645" cy="314645"/>
           </a:xfrm>
           <a:prstGeom prst="ellipse">
             <a:avLst/>
@@ -4346,8 +4346,8 @@
         </p:nvSpPr>
         <p:spPr>
           <a:xfrm>
-            <a:off x="4704486" y="2598318"/>
-            <a:ext cx="289763" cy="289763"/>
+            <a:off x="4993035" y="2860197"/>
+            <a:ext cx="314645" cy="314645"/>
           </a:xfrm>
           <a:prstGeom prst="ellipse">
             <a:avLst/>
@@ -4371,8 +4371,8 @@
         </p:nvSpPr>
         <p:spPr>
           <a:xfrm>
-            <a:off x="5171846" y="2598318"/>
-            <a:ext cx="289763" cy="289763"/>
+            <a:off x="5500527" y="2860197"/>
+            <a:ext cx="314645" cy="314645"/>
           </a:xfrm>
           <a:prstGeom prst="ellipse">
             <a:avLst/>
@@ -4396,8 +4396,8 @@
         </p:nvSpPr>
         <p:spPr>
           <a:xfrm>
-            <a:off x="1344168" y="2509520"/>
-            <a:ext cx="4206240" cy="467360"/>
+            <a:off x="1344168" y="2763774"/>
+            <a:ext cx="4567428" cy="507492"/>
           </a:xfrm>
           <a:prstGeom prst="rect">
             <a:avLst/>
@@ -8813,7 +8813,7 @@
         </p:nvSpPr>
         <p:spPr>
           <a:xfrm>
-            <a:off x="548640" y="1773936"/>
+            <a:off x="548640" y="1796796"/>
             <a:ext cx="566928" cy="566928"/>
           </a:xfrm>
           <a:prstGeom prst="roundRect">
@@ -8860,8 +8860,8 @@
         </p:nvSpPr>
         <p:spPr>
           <a:xfrm>
-            <a:off x="1344168" y="1668780"/>
-            <a:ext cx="388620" cy="388620"/>
+            <a:off x="1344168" y="1563624"/>
+            <a:ext cx="516636" cy="516636"/>
           </a:xfrm>
           <a:prstGeom prst="rect">
             <a:avLst/>
@@ -8885,8 +8885,8 @@
         </p:nvSpPr>
         <p:spPr>
           <a:xfrm>
-            <a:off x="1410233" y="1734845"/>
-            <a:ext cx="256489" cy="256489"/>
+            <a:off x="1431996" y="1651452"/>
+            <a:ext cx="340980" cy="340980"/>
           </a:xfrm>
           <a:prstGeom prst="ellipse">
             <a:avLst/>
@@ -8910,8 +8910,8 @@
         </p:nvSpPr>
         <p:spPr>
           <a:xfrm>
-            <a:off x="1732788" y="1668780"/>
-            <a:ext cx="388620" cy="388620"/>
+            <a:off x="1860804" y="1563624"/>
+            <a:ext cx="516636" cy="516636"/>
           </a:xfrm>
           <a:prstGeom prst="rect">
             <a:avLst/>
@@ -8935,8 +8935,8 @@
         </p:nvSpPr>
         <p:spPr>
           <a:xfrm>
-            <a:off x="1798853" y="1734845"/>
-            <a:ext cx="256489" cy="256489"/>
+            <a:off x="1948632" y="1651452"/>
+            <a:ext cx="340980" cy="340980"/>
           </a:xfrm>
           <a:prstGeom prst="ellipse">
             <a:avLst/>
@@ -8960,8 +8960,8 @@
         </p:nvSpPr>
         <p:spPr>
           <a:xfrm>
-            <a:off x="2121408" y="1668780"/>
-            <a:ext cx="388620" cy="388620"/>
+            <a:off x="2377440" y="1563624"/>
+            <a:ext cx="516636" cy="516636"/>
           </a:xfrm>
           <a:prstGeom prst="rect">
             <a:avLst/>
@@ -8985,8 +8985,8 @@
         </p:nvSpPr>
         <p:spPr>
           <a:xfrm>
-            <a:off x="2187473" y="1734845"/>
-            <a:ext cx="256489" cy="256489"/>
+            <a:off x="2465268" y="1651452"/>
+            <a:ext cx="340980" cy="340980"/>
           </a:xfrm>
           <a:prstGeom prst="ellipse">
             <a:avLst/>
@@ -9010,8 +9010,8 @@
         </p:nvSpPr>
         <p:spPr>
           <a:xfrm>
-            <a:off x="2510028" y="1668780"/>
-            <a:ext cx="388620" cy="388620"/>
+            <a:off x="2894076" y="1563624"/>
+            <a:ext cx="516636" cy="516636"/>
           </a:xfrm>
           <a:prstGeom prst="rect">
             <a:avLst/>
@@ -9035,8 +9035,8 @@
         </p:nvSpPr>
         <p:spPr>
           <a:xfrm>
-            <a:off x="2576093" y="1734845"/>
-            <a:ext cx="256489" cy="256489"/>
+            <a:off x="2981904" y="1651452"/>
+            <a:ext cx="340980" cy="340980"/>
           </a:xfrm>
           <a:prstGeom prst="ellipse">
             <a:avLst/>
@@ -9060,8 +9060,8 @@
         </p:nvSpPr>
         <p:spPr>
           <a:xfrm>
-            <a:off x="2898648" y="1668780"/>
-            <a:ext cx="388620" cy="388620"/>
+            <a:off x="3410712" y="1563624"/>
+            <a:ext cx="516636" cy="516636"/>
           </a:xfrm>
           <a:prstGeom prst="rect">
             <a:avLst/>
@@ -9085,8 +9085,8 @@
         </p:nvSpPr>
         <p:spPr>
           <a:xfrm>
-            <a:off x="2964713" y="1734845"/>
-            <a:ext cx="256489" cy="256489"/>
+            <a:off x="3498540" y="1651452"/>
+            <a:ext cx="340980" cy="340980"/>
           </a:xfrm>
           <a:prstGeom prst="ellipse">
             <a:avLst/>
@@ -9110,8 +9110,8 @@
         </p:nvSpPr>
         <p:spPr>
           <a:xfrm>
-            <a:off x="1344168" y="2057400"/>
-            <a:ext cx="388620" cy="388620"/>
+            <a:off x="1344168" y="2080260"/>
+            <a:ext cx="516636" cy="516636"/>
           </a:xfrm>
           <a:prstGeom prst="rect">
             <a:avLst/>
@@ -9135,8 +9135,8 @@
         </p:nvSpPr>
         <p:spPr>
           <a:xfrm>
-            <a:off x="1410233" y="2123465"/>
-            <a:ext cx="256489" cy="256489"/>
+            <a:off x="1431996" y="2168088"/>
+            <a:ext cx="340980" cy="340980"/>
           </a:xfrm>
           <a:prstGeom prst="ellipse">
             <a:avLst/>
@@ -9160,8 +9160,8 @@
         </p:nvSpPr>
         <p:spPr>
           <a:xfrm>
-            <a:off x="1732788" y="2057400"/>
-            <a:ext cx="388620" cy="388620"/>
+            <a:off x="1860804" y="2080260"/>
+            <a:ext cx="516636" cy="516636"/>
           </a:xfrm>
           <a:prstGeom prst="rect">
             <a:avLst/>
@@ -9185,8 +9185,8 @@
         </p:nvSpPr>
         <p:spPr>
           <a:xfrm>
-            <a:off x="1798853" y="2123465"/>
-            <a:ext cx="256489" cy="256489"/>
+            <a:off x="1948632" y="2168088"/>
+            <a:ext cx="340980" cy="340980"/>
           </a:xfrm>
           <a:prstGeom prst="ellipse">
             <a:avLst/>
@@ -9210,8 +9210,8 @@
         </p:nvSpPr>
         <p:spPr>
           <a:xfrm>
-            <a:off x="2121408" y="2057400"/>
-            <a:ext cx="388620" cy="388620"/>
+            <a:off x="2377440" y="2080260"/>
+            <a:ext cx="516636" cy="516636"/>
           </a:xfrm>
           <a:prstGeom prst="rect">
             <a:avLst/>
@@ -9235,8 +9235,8 @@
         </p:nvSpPr>
         <p:spPr>
           <a:xfrm>
-            <a:off x="2187473" y="2123465"/>
-            <a:ext cx="256489" cy="256489"/>
+            <a:off x="2465268" y="2168088"/>
+            <a:ext cx="340980" cy="340980"/>
           </a:xfrm>
           <a:prstGeom prst="ellipse">
             <a:avLst/>
@@ -9260,8 +9260,8 @@
         </p:nvSpPr>
         <p:spPr>
           <a:xfrm>
-            <a:off x="2510028" y="2057400"/>
-            <a:ext cx="388620" cy="388620"/>
+            <a:off x="2894076" y="2080260"/>
+            <a:ext cx="516636" cy="516636"/>
           </a:xfrm>
           <a:prstGeom prst="rect">
             <a:avLst/>
@@ -9285,8 +9285,8 @@
         </p:nvSpPr>
         <p:spPr>
           <a:xfrm>
-            <a:off x="2576093" y="2123465"/>
-            <a:ext cx="256489" cy="256489"/>
+            <a:off x="2981904" y="2168088"/>
+            <a:ext cx="340980" cy="340980"/>
           </a:xfrm>
           <a:prstGeom prst="ellipse">
             <a:avLst/>
@@ -9310,8 +9310,8 @@
         </p:nvSpPr>
         <p:spPr>
           <a:xfrm>
-            <a:off x="2898648" y="2057400"/>
-            <a:ext cx="388620" cy="388620"/>
+            <a:off x="3410712" y="2080260"/>
+            <a:ext cx="516636" cy="516636"/>
           </a:xfrm>
           <a:prstGeom prst="rect">
             <a:avLst/>
@@ -9335,8 +9335,8 @@
         </p:nvSpPr>
         <p:spPr>
           <a:xfrm>
-            <a:off x="2964713" y="2123465"/>
-            <a:ext cx="256489" cy="256489"/>
+            <a:off x="3498540" y="2168088"/>
+            <a:ext cx="340980" cy="340980"/>
           </a:xfrm>
           <a:prstGeom prst="ellipse">
             <a:avLst/>
@@ -9360,8 +9360,8 @@
         </p:nvSpPr>
         <p:spPr>
           <a:xfrm>
-            <a:off x="1344168" y="1668780"/>
-            <a:ext cx="1943100" cy="777240"/>
+            <a:off x="1344168" y="1563624"/>
+            <a:ext cx="2583180" cy="1033272"/>
           </a:xfrm>
           <a:prstGeom prst="rect">
             <a:avLst/>
@@ -9387,8 +9387,8 @@
         </p:nvSpPr>
         <p:spPr>
           <a:xfrm>
-            <a:off x="3607308" y="1668780"/>
-            <a:ext cx="388620" cy="388620"/>
+            <a:off x="4247388" y="1563624"/>
+            <a:ext cx="516636" cy="516636"/>
           </a:xfrm>
           <a:prstGeom prst="rect">
             <a:avLst/>
@@ -9412,8 +9412,8 @@
         </p:nvSpPr>
         <p:spPr>
           <a:xfrm>
-            <a:off x="3673373" y="1734845"/>
-            <a:ext cx="256489" cy="256489"/>
+            <a:off x="4335216" y="1651452"/>
+            <a:ext cx="340980" cy="340980"/>
           </a:xfrm>
           <a:prstGeom prst="ellipse">
             <a:avLst/>
@@ -9437,8 +9437,8 @@
         </p:nvSpPr>
         <p:spPr>
           <a:xfrm>
-            <a:off x="3995928" y="1668780"/>
-            <a:ext cx="388620" cy="388620"/>
+            <a:off x="4764024" y="1563624"/>
+            <a:ext cx="516636" cy="516636"/>
           </a:xfrm>
           <a:prstGeom prst="rect">
             <a:avLst/>
@@ -9462,8 +9462,8 @@
         </p:nvSpPr>
         <p:spPr>
           <a:xfrm>
-            <a:off x="4061993" y="1734845"/>
-            <a:ext cx="256489" cy="256489"/>
+            <a:off x="4851852" y="1651452"/>
+            <a:ext cx="340980" cy="340980"/>
           </a:xfrm>
           <a:prstGeom prst="ellipse">
             <a:avLst/>
@@ -9487,8 +9487,8 @@
         </p:nvSpPr>
         <p:spPr>
           <a:xfrm>
-            <a:off x="4384548" y="1668780"/>
-            <a:ext cx="388620" cy="388620"/>
+            <a:off x="5280660" y="1563624"/>
+            <a:ext cx="516636" cy="516636"/>
           </a:xfrm>
           <a:prstGeom prst="rect">
             <a:avLst/>
@@ -9512,8 +9512,8 @@
         </p:nvSpPr>
         <p:spPr>
           <a:xfrm>
-            <a:off x="4450613" y="1734845"/>
-            <a:ext cx="256489" cy="256489"/>
+            <a:off x="5368488" y="1651452"/>
+            <a:ext cx="340980" cy="340980"/>
           </a:xfrm>
           <a:prstGeom prst="ellipse">
             <a:avLst/>
@@ -9537,8 +9537,8 @@
         </p:nvSpPr>
         <p:spPr>
           <a:xfrm>
-            <a:off x="4773168" y="1668780"/>
-            <a:ext cx="388620" cy="388620"/>
+            <a:off x="5797296" y="1563624"/>
+            <a:ext cx="516636" cy="516636"/>
           </a:xfrm>
           <a:prstGeom prst="rect">
             <a:avLst/>
@@ -9562,8 +9562,8 @@
         </p:nvSpPr>
         <p:spPr>
           <a:xfrm>
-            <a:off x="4839233" y="1734845"/>
-            <a:ext cx="256489" cy="256489"/>
+            <a:off x="5885124" y="1651452"/>
+            <a:ext cx="340980" cy="340980"/>
           </a:xfrm>
           <a:prstGeom prst="ellipse">
             <a:avLst/>
@@ -9587,8 +9587,8 @@
         </p:nvSpPr>
         <p:spPr>
           <a:xfrm>
-            <a:off x="5161788" y="1668780"/>
-            <a:ext cx="388620" cy="388620"/>
+            <a:off x="6313932" y="1563624"/>
+            <a:ext cx="516636" cy="516636"/>
           </a:xfrm>
           <a:prstGeom prst="rect">
             <a:avLst/>
@@ -9612,8 +9612,8 @@
         </p:nvSpPr>
         <p:spPr>
           <a:xfrm>
-            <a:off x="3607308" y="2057400"/>
-            <a:ext cx="388620" cy="388620"/>
+            <a:off x="4247388" y="2080260"/>
+            <a:ext cx="516636" cy="516636"/>
           </a:xfrm>
           <a:prstGeom prst="rect">
             <a:avLst/>
@@ -9637,8 +9637,8 @@
         </p:nvSpPr>
         <p:spPr>
           <a:xfrm>
-            <a:off x="3995928" y="2057400"/>
-            <a:ext cx="388620" cy="388620"/>
+            <a:off x="4764024" y="2080260"/>
+            <a:ext cx="516636" cy="516636"/>
           </a:xfrm>
           <a:prstGeom prst="rect">
             <a:avLst/>
@@ -9662,8 +9662,8 @@
         </p:nvSpPr>
         <p:spPr>
           <a:xfrm>
-            <a:off x="4384548" y="2057400"/>
-            <a:ext cx="388620" cy="388620"/>
+            <a:off x="5280660" y="2080260"/>
+            <a:ext cx="516636" cy="516636"/>
           </a:xfrm>
           <a:prstGeom prst="rect">
             <a:avLst/>
@@ -9687,8 +9687,8 @@
         </p:nvSpPr>
         <p:spPr>
           <a:xfrm>
-            <a:off x="4773168" y="2057400"/>
-            <a:ext cx="388620" cy="388620"/>
+            <a:off x="5797296" y="2080260"/>
+            <a:ext cx="516636" cy="516636"/>
           </a:xfrm>
           <a:prstGeom prst="rect">
             <a:avLst/>
@@ -9712,8 +9712,8 @@
         </p:nvSpPr>
         <p:spPr>
           <a:xfrm>
-            <a:off x="5161788" y="2057400"/>
-            <a:ext cx="388620" cy="388620"/>
+            <a:off x="6313932" y="2080260"/>
+            <a:ext cx="516636" cy="516636"/>
           </a:xfrm>
           <a:prstGeom prst="rect">
             <a:avLst/>
@@ -9737,8 +9737,8 @@
         </p:nvSpPr>
         <p:spPr>
           <a:xfrm>
-            <a:off x="3607308" y="1668780"/>
-            <a:ext cx="1943100" cy="777240"/>
+            <a:off x="4247388" y="1563624"/>
+            <a:ext cx="2583180" cy="1033272"/>
           </a:xfrm>
           <a:prstGeom prst="rect">
             <a:avLst/>
@@ -12411,7 +12411,7 @@
         </p:nvSpPr>
         <p:spPr>
           <a:xfrm>
-            <a:off x="2391156" y="2372868"/>
+            <a:off x="2571750" y="2372868"/>
             <a:ext cx="283464" cy="283464"/>
           </a:xfrm>
           <a:prstGeom prst="ellipse">
@@ -12436,7 +12436,7 @@
         </p:nvSpPr>
         <p:spPr>
           <a:xfrm>
-            <a:off x="2848356" y="2372868"/>
+            <a:off x="3028950" y="2372868"/>
             <a:ext cx="283464" cy="283464"/>
           </a:xfrm>
           <a:prstGeom prst="ellipse">
@@ -12461,7 +12461,7 @@
         </p:nvSpPr>
         <p:spPr>
           <a:xfrm>
-            <a:off x="3305556" y="2372868"/>
+            <a:off x="3486150" y="2372868"/>
             <a:ext cx="283464" cy="283464"/>
           </a:xfrm>
           <a:prstGeom prst="ellipse">
@@ -12486,7 +12486,7 @@
         </p:nvSpPr>
         <p:spPr>
           <a:xfrm>
-            <a:off x="3762756" y="2372868"/>
+            <a:off x="3943350" y="2372868"/>
             <a:ext cx="283464" cy="283464"/>
           </a:xfrm>
           <a:prstGeom prst="ellipse">
@@ -12511,7 +12511,7 @@
         </p:nvSpPr>
         <p:spPr>
           <a:xfrm>
-            <a:off x="4219956" y="2372868"/>
+            <a:off x="4400550" y="2372868"/>
             <a:ext cx="283464" cy="283464"/>
           </a:xfrm>
           <a:prstGeom prst="ellipse">
@@ -12536,7 +12536,7 @@
         </p:nvSpPr>
         <p:spPr>
           <a:xfrm>
-            <a:off x="2391156" y="2830068"/>
+            <a:off x="2571750" y="2830068"/>
             <a:ext cx="283464" cy="283464"/>
           </a:xfrm>
           <a:prstGeom prst="ellipse">
@@ -12561,7 +12561,7 @@
         </p:nvSpPr>
         <p:spPr>
           <a:xfrm>
-            <a:off x="2848356" y="2830068"/>
+            <a:off x="3028950" y="2830068"/>
             <a:ext cx="283464" cy="283464"/>
           </a:xfrm>
           <a:prstGeom prst="ellipse">
@@ -12586,7 +12586,7 @@
         </p:nvSpPr>
         <p:spPr>
           <a:xfrm>
-            <a:off x="3305556" y="2830068"/>
+            <a:off x="3486150" y="2830068"/>
             <a:ext cx="283464" cy="283464"/>
           </a:xfrm>
           <a:prstGeom prst="ellipse">
@@ -12611,7 +12611,7 @@
         </p:nvSpPr>
         <p:spPr>
           <a:xfrm>
-            <a:off x="3762756" y="2830068"/>
+            <a:off x="3943350" y="2830068"/>
             <a:ext cx="283464" cy="283464"/>
           </a:xfrm>
           <a:prstGeom prst="ellipse">
@@ -12636,7 +12636,7 @@
         </p:nvSpPr>
         <p:spPr>
           <a:xfrm>
-            <a:off x="4219956" y="2830068"/>
+            <a:off x="4400550" y="2830068"/>
             <a:ext cx="283464" cy="283464"/>
           </a:xfrm>
           <a:prstGeom prst="ellipse">
@@ -12661,7 +12661,7 @@
         </p:nvSpPr>
         <p:spPr>
           <a:xfrm>
-            <a:off x="2304288" y="2286000"/>
+            <a:off x="2484882" y="2286000"/>
             <a:ext cx="2286000" cy="914400"/>
           </a:xfrm>
           <a:prstGeom prst="rect">
@@ -12737,7 +12737,7 @@
         </p:nvSpPr>
         <p:spPr>
           <a:xfrm>
-            <a:off x="8577072" y="2372868"/>
+            <a:off x="8757666" y="2372868"/>
             <a:ext cx="283464" cy="283464"/>
           </a:xfrm>
           <a:prstGeom prst="ellipse">
@@ -12762,7 +12762,7 @@
         </p:nvSpPr>
         <p:spPr>
           <a:xfrm>
-            <a:off x="9034272" y="2372868"/>
+            <a:off x="9214866" y="2372868"/>
             <a:ext cx="283464" cy="283464"/>
           </a:xfrm>
           <a:prstGeom prst="ellipse">
@@ -12787,7 +12787,7 @@
         </p:nvSpPr>
         <p:spPr>
           <a:xfrm>
-            <a:off x="9491472" y="2372868"/>
+            <a:off x="9672066" y="2372868"/>
             <a:ext cx="283464" cy="283464"/>
           </a:xfrm>
           <a:prstGeom prst="ellipse">
@@ -12812,7 +12812,7 @@
         </p:nvSpPr>
         <p:spPr>
           <a:xfrm>
-            <a:off x="8577072" y="2830068"/>
+            <a:off x="8757666" y="2830068"/>
             <a:ext cx="283464" cy="283464"/>
           </a:xfrm>
           <a:prstGeom prst="ellipse">
@@ -12837,7 +12837,7 @@
         </p:nvSpPr>
         <p:spPr>
           <a:xfrm>
-            <a:off x="9034272" y="2830068"/>
+            <a:off x="9214866" y="2830068"/>
             <a:ext cx="283464" cy="283464"/>
           </a:xfrm>
           <a:prstGeom prst="ellipse">
@@ -12862,7 +12862,7 @@
         </p:nvSpPr>
         <p:spPr>
           <a:xfrm>
-            <a:off x="8490204" y="2286000"/>
+            <a:off x="8670798" y="2286000"/>
             <a:ext cx="1371600" cy="914400"/>
           </a:xfrm>
           <a:prstGeom prst="rect">
@@ -12938,7 +12938,7 @@
         </p:nvSpPr>
         <p:spPr>
           <a:xfrm>
-            <a:off x="1933956" y="4018788"/>
+            <a:off x="2114550" y="4018788"/>
             <a:ext cx="283464" cy="283464"/>
           </a:xfrm>
           <a:prstGeom prst="ellipse">
@@ -12963,7 +12963,7 @@
         </p:nvSpPr>
         <p:spPr>
           <a:xfrm>
-            <a:off x="2391156" y="4018788"/>
+            <a:off x="2571750" y="4018788"/>
             <a:ext cx="283464" cy="283464"/>
           </a:xfrm>
           <a:prstGeom prst="ellipse">
@@ -12988,7 +12988,7 @@
         </p:nvSpPr>
         <p:spPr>
           <a:xfrm>
-            <a:off x="2848356" y="4018788"/>
+            <a:off x="3028950" y="4018788"/>
             <a:ext cx="283464" cy="283464"/>
           </a:xfrm>
           <a:prstGeom prst="ellipse">
@@ -13013,7 +13013,7 @@
         </p:nvSpPr>
         <p:spPr>
           <a:xfrm>
-            <a:off x="3305556" y="4018788"/>
+            <a:off x="3486150" y="4018788"/>
             <a:ext cx="283464" cy="283464"/>
           </a:xfrm>
           <a:prstGeom prst="ellipse">
@@ -13038,7 +13038,7 @@
         </p:nvSpPr>
         <p:spPr>
           <a:xfrm>
-            <a:off x="3762756" y="4018788"/>
+            <a:off x="3943350" y="4018788"/>
             <a:ext cx="283464" cy="283464"/>
           </a:xfrm>
           <a:prstGeom prst="ellipse">
@@ -13063,7 +13063,7 @@
         </p:nvSpPr>
         <p:spPr>
           <a:xfrm>
-            <a:off x="4219956" y="4018788"/>
+            <a:off x="4400550" y="4018788"/>
             <a:ext cx="283464" cy="283464"/>
           </a:xfrm>
           <a:prstGeom prst="ellipse">
@@ -13088,7 +13088,7 @@
         </p:nvSpPr>
         <p:spPr>
           <a:xfrm>
-            <a:off x="4677156" y="4018788"/>
+            <a:off x="4857750" y="4018788"/>
             <a:ext cx="283464" cy="283464"/>
           </a:xfrm>
           <a:prstGeom prst="ellipse">
@@ -13113,7 +13113,7 @@
         </p:nvSpPr>
         <p:spPr>
           <a:xfrm>
-            <a:off x="1933956" y="4475988"/>
+            <a:off x="2114550" y="4475988"/>
             <a:ext cx="283464" cy="283464"/>
           </a:xfrm>
           <a:prstGeom prst="ellipse">
@@ -13138,7 +13138,7 @@
         </p:nvSpPr>
         <p:spPr>
           <a:xfrm>
-            <a:off x="2391156" y="4475988"/>
+            <a:off x="2571750" y="4475988"/>
             <a:ext cx="283464" cy="283464"/>
           </a:xfrm>
           <a:prstGeom prst="ellipse">
@@ -13163,7 +13163,7 @@
         </p:nvSpPr>
         <p:spPr>
           <a:xfrm>
-            <a:off x="2848356" y="4475988"/>
+            <a:off x="3028950" y="4475988"/>
             <a:ext cx="283464" cy="283464"/>
           </a:xfrm>
           <a:prstGeom prst="ellipse">
@@ -13188,7 +13188,7 @@
         </p:nvSpPr>
         <p:spPr>
           <a:xfrm>
-            <a:off x="3305556" y="4475988"/>
+            <a:off x="3486150" y="4475988"/>
             <a:ext cx="283464" cy="283464"/>
           </a:xfrm>
           <a:prstGeom prst="ellipse">
@@ -13213,7 +13213,7 @@
         </p:nvSpPr>
         <p:spPr>
           <a:xfrm>
-            <a:off x="3762756" y="4475988"/>
+            <a:off x="3943350" y="4475988"/>
             <a:ext cx="283464" cy="283464"/>
           </a:xfrm>
           <a:prstGeom prst="ellipse">
@@ -13238,7 +13238,7 @@
         </p:nvSpPr>
         <p:spPr>
           <a:xfrm>
-            <a:off x="4219956" y="4475988"/>
+            <a:off x="4400550" y="4475988"/>
             <a:ext cx="283464" cy="283464"/>
           </a:xfrm>
           <a:prstGeom prst="ellipse">
@@ -13263,7 +13263,7 @@
         </p:nvSpPr>
         <p:spPr>
           <a:xfrm>
-            <a:off x="1847088" y="3931920"/>
+            <a:off x="2027682" y="3931920"/>
             <a:ext cx="3200400" cy="914400"/>
           </a:xfrm>
           <a:prstGeom prst="rect">
@@ -13339,7 +13339,7 @@
         </p:nvSpPr>
         <p:spPr>
           <a:xfrm>
-            <a:off x="7434072" y="4018788"/>
+            <a:off x="7614666" y="4018788"/>
             <a:ext cx="283464" cy="283464"/>
           </a:xfrm>
           <a:prstGeom prst="ellipse">
@@ -13364,7 +13364,7 @@
         </p:nvSpPr>
         <p:spPr>
           <a:xfrm>
-            <a:off x="7891272" y="4018788"/>
+            <a:off x="8071866" y="4018788"/>
             <a:ext cx="283464" cy="283464"/>
           </a:xfrm>
           <a:prstGeom prst="ellipse">
@@ -13389,7 +13389,7 @@
         </p:nvSpPr>
         <p:spPr>
           <a:xfrm>
-            <a:off x="8348472" y="4018788"/>
+            <a:off x="8529066" y="4018788"/>
             <a:ext cx="283464" cy="283464"/>
           </a:xfrm>
           <a:prstGeom prst="ellipse">
@@ -13414,7 +13414,7 @@
         </p:nvSpPr>
         <p:spPr>
           <a:xfrm>
-            <a:off x="8805672" y="4018788"/>
+            <a:off x="8986266" y="4018788"/>
             <a:ext cx="283464" cy="283464"/>
           </a:xfrm>
           <a:prstGeom prst="ellipse">
@@ -13439,7 +13439,7 @@
         </p:nvSpPr>
         <p:spPr>
           <a:xfrm>
-            <a:off x="9262872" y="4018788"/>
+            <a:off x="9443466" y="4018788"/>
             <a:ext cx="283464" cy="283464"/>
           </a:xfrm>
           <a:prstGeom prst="ellipse">
@@ -13464,7 +13464,7 @@
         </p:nvSpPr>
         <p:spPr>
           <a:xfrm>
-            <a:off x="9720072" y="4018788"/>
+            <a:off x="9900666" y="4018788"/>
             <a:ext cx="283464" cy="283464"/>
           </a:xfrm>
           <a:prstGeom prst="ellipse">
@@ -13489,7 +13489,7 @@
         </p:nvSpPr>
         <p:spPr>
           <a:xfrm>
-            <a:off x="10177272" y="4018788"/>
+            <a:off x="10357866" y="4018788"/>
             <a:ext cx="283464" cy="283464"/>
           </a:xfrm>
           <a:prstGeom prst="ellipse">
@@ -13514,7 +13514,7 @@
         </p:nvSpPr>
         <p:spPr>
           <a:xfrm>
-            <a:off x="10634472" y="4018788"/>
+            <a:off x="10815066" y="4018788"/>
             <a:ext cx="283464" cy="283464"/>
           </a:xfrm>
           <a:prstGeom prst="ellipse">
@@ -13539,7 +13539,7 @@
         </p:nvSpPr>
         <p:spPr>
           <a:xfrm>
-            <a:off x="7434072" y="4475988"/>
+            <a:off x="7614666" y="4475988"/>
             <a:ext cx="283464" cy="283464"/>
           </a:xfrm>
           <a:prstGeom prst="ellipse">
@@ -13564,7 +13564,7 @@
         </p:nvSpPr>
         <p:spPr>
           <a:xfrm>
-            <a:off x="7891272" y="4475988"/>
+            <a:off x="8071866" y="4475988"/>
             <a:ext cx="283464" cy="283464"/>
           </a:xfrm>
           <a:prstGeom prst="ellipse">
@@ -13589,7 +13589,7 @@
         </p:nvSpPr>
         <p:spPr>
           <a:xfrm>
-            <a:off x="8348472" y="4475988"/>
+            <a:off x="8529066" y="4475988"/>
             <a:ext cx="283464" cy="283464"/>
           </a:xfrm>
           <a:prstGeom prst="ellipse">
@@ -13614,7 +13614,7 @@
         </p:nvSpPr>
         <p:spPr>
           <a:xfrm>
-            <a:off x="8805672" y="4475988"/>
+            <a:off x="8986266" y="4475988"/>
             <a:ext cx="283464" cy="283464"/>
           </a:xfrm>
           <a:prstGeom prst="ellipse">
@@ -13639,7 +13639,7 @@
         </p:nvSpPr>
         <p:spPr>
           <a:xfrm>
-            <a:off x="9262872" y="4475988"/>
+            <a:off x="9443466" y="4475988"/>
             <a:ext cx="283464" cy="283464"/>
           </a:xfrm>
           <a:prstGeom prst="ellipse">
@@ -13664,7 +13664,7 @@
         </p:nvSpPr>
         <p:spPr>
           <a:xfrm>
-            <a:off x="9720072" y="4475988"/>
+            <a:off x="9900666" y="4475988"/>
             <a:ext cx="283464" cy="283464"/>
           </a:xfrm>
           <a:prstGeom prst="ellipse">
@@ -13689,7 +13689,7 @@
         </p:nvSpPr>
         <p:spPr>
           <a:xfrm>
-            <a:off x="10177272" y="4475988"/>
+            <a:off x="10357866" y="4475988"/>
             <a:ext cx="283464" cy="283464"/>
           </a:xfrm>
           <a:prstGeom prst="ellipse">
@@ -13714,7 +13714,7 @@
         </p:nvSpPr>
         <p:spPr>
           <a:xfrm>
-            <a:off x="10634472" y="4475988"/>
+            <a:off x="10815066" y="4475988"/>
             <a:ext cx="283464" cy="283464"/>
           </a:xfrm>
           <a:prstGeom prst="ellipse">
@@ -13739,7 +13739,7 @@
         </p:nvSpPr>
         <p:spPr>
           <a:xfrm>
-            <a:off x="7347204" y="3931920"/>
+            <a:off x="7527798" y="3931920"/>
             <a:ext cx="3657600" cy="914400"/>
           </a:xfrm>
           <a:prstGeom prst="rect">

--- a/dist/초1/수학/몇째와짝수홀수/초1_수학_몇째와짝수홀수_02_짝수와홀수.pptx
+++ b/dist/초1/수학/몇째와짝수홀수/초1_수학_몇째와짝수홀수_02_짝수와홀수.pptx
@@ -121,13 +121,13 @@
   <p:extLst>
     <p:ext uri="{521415D9-36F7-43E2-AB2F-B90AF26B5E84}">
       <p14:sectionLst xmlns:p14="http://schemas.microsoft.com/office/powerpoint/2010/main">
-        <p14:section name="도입" id="{d3bebc85-69da-e866-609a-095048c223cf}">
+        <p14:section name="도입" id="{ab601274-f416-a708-87d2-16784d19fc16}">
           <p14:sldIdLst>
             <p14:sldId id="256"/>
             <p14:sldId id="257"/>
           </p14:sldIdLst>
         </p14:section>
-        <p14:section name="개념" id="{a72298d8-d879-95e2-9ad1-21478cf08dda}">
+        <p14:section name="개념" id="{826b7d4d-e0a0-967c-7c1c-46cb720018ff}">
           <p14:sldIdLst>
             <p14:sldId id="258"/>
             <p14:sldId id="259"/>
@@ -136,32 +136,32 @@
             <p14:sldId id="263"/>
           </p14:sldIdLst>
         </p14:section>
-        <p14:section name="연습" id="{d7690fa4-1931-0de4-f125-f4e7bb90c49f}">
+        <p14:section name="연습" id="{95550076-c3b3-6c56-9cff-d9f7658ff70d}">
           <p14:sldIdLst>
             <p14:sldId id="261"/>
             <p14:sldId id="264"/>
             <p14:sldId id="265"/>
           </p14:sldIdLst>
         </p14:section>
-        <p14:section name="개념" id="{375d65ae-c874-f1b5-d9c9-537ba84f092b}">
+        <p14:section name="개념" id="{841821c9-8dc8-d10e-a845-9bf9d9e3a7ed}">
           <p14:sldIdLst/>
         </p14:section>
-        <p14:section name="연습" id="{65594fb6-223a-1524-180e-17af85675a21}">
+        <p14:section name="연습" id="{22eb892c-d0bd-710e-b0ef-77520461e61c}">
           <p14:sldIdLst/>
         </p14:section>
-        <p14:section name="확인" id="{21091f42-2e4f-49c3-4bc1-6bf07f74e8ed}">
+        <p14:section name="확인" id="{d3124def-9947-9414-cf09-014b890820fa}">
           <p14:sldIdLst>
             <p14:sldId id="266"/>
             <p14:sldId id="267"/>
             <p14:sldId id="268"/>
           </p14:sldIdLst>
         </p14:section>
-        <p14:section name="정리" id="{44209ae3-30b6-8980-5a61-60b0a6f3620c}">
+        <p14:section name="정리" id="{bb00af1c-71f6-775e-aec0-21bfb416c89d}">
           <p14:sldIdLst>
             <p14:sldId id="269"/>
           </p14:sldIdLst>
         </p14:section>
-        <p14:section name="보충" id="{72813450-69e2-bc24-ac52-af95a0b4688d}">
+        <p14:section name="보충" id="{441a3c54-0624-6c54-1ada-606d3cfe0cb9}">
           <p14:sldIdLst>
             <p14:sldId id="270"/>
           </p14:sldIdLst>
